--- a/submission/07_deck/walnut_internal_brain_deck.pptx
+++ b/submission/07_deck/walnut_internal_brain_deck.pptx
@@ -734,7 +734,7 @@
           <a:lstStyle/>
           <a:p>
             <a:r>
-              <a:t>This is the company brain itself: a relationship map, full history you can rewind, source snapshots and change tracking. It is Walnut's original engine, reused unchanged.</a:t>
+              <a:t>This is the company brain itself: a relationship map, full history you can rewind, source snapshots and change tracking. This is the Walnut engine the Internal Brain runs on.</a:t>
             </a:r>
           </a:p>
         </p:txBody>
